--- a/lci_nutrition.pptx
+++ b/lci_nutrition.pptx
@@ -3845,7 +3845,7 @@
             </a:pPr>
             <a:r>
               <a:rPr/>
-              <a:t>Surgeons</a:t>
+              <a:t>Surgeon</a:t>
             </a:r>
           </a:p>
           <a:p>
@@ -3853,20 +3853,6 @@
             <a:r>
               <a:rPr/>
               <a:t>Jonathan Salo MD</a:t>
-            </a:r>
-          </a:p>
-          <a:p>
-            <a:pPr lvl="0"/>
-            <a:r>
-              <a:rPr/>
-              <a:t>Jeffrey Hagen MD</a:t>
-            </a:r>
-          </a:p>
-          <a:p>
-            <a:pPr lvl="0"/>
-            <a:r>
-              <a:rPr/>
-              <a:t>Michael Roach MD</a:t>
             </a:r>
           </a:p>
         </p:txBody>

--- a/lci_nutrition.pptx
+++ b/lci_nutrition.pptx
@@ -18,6 +18,7 @@
     <p:sldId id="266" r:id="rId12"/>
     <p:sldId id="267" r:id="rId13"/>
     <p:sldId id="268" r:id="rId14"/>
+    <p:sldId id="269" r:id="rId15"/>
   </p:sldIdLst>
   <p:sldSz cx="9144000" cy="5143500" type="screen16x9"/>
   <p:notesSz cx="6858000" cy="9144000"/>
@@ -3556,7 +3557,7 @@
             </a:pPr>
             <a:r>
               <a:rPr/>
-              <a:t>Jejunostomy Feeds with Diabetes</a:t>
+              <a:t>Jejunostomy Typical Regimen</a:t>
             </a:r>
           </a:p>
         </p:txBody>
@@ -3576,56 +3577,40 @@
           <a:bodyPr/>
           <a:lstStyle/>
           <a:p>
+            <a:pPr lvl="0"/>
+            <a:r>
+              <a:rPr/>
+              <a:t>Jejunostomy tube feeds for 16 hours (6pm-10am)</a:t>
+            </a:r>
+          </a:p>
+          <a:p>
+            <a:pPr lvl="1"/>
+            <a:r>
+              <a:rPr/>
+              <a:t>Men: 75mL/hour x 16 hours = 5 cartons</a:t>
+            </a:r>
+          </a:p>
+          <a:p>
+            <a:pPr lvl="1"/>
+            <a:r>
+              <a:rPr/>
+              <a:t>Women: 60mL/hour x 16 hours = 4 cartons</a:t>
+            </a:r>
+          </a:p>
+          <a:p>
+            <a:pPr lvl="0"/>
+            <a:r>
+              <a:rPr/>
+              <a:t>Water 240ml (8oz) via syringe 4x/day</a:t>
+            </a:r>
+          </a:p>
+          <a:p>
             <a:pPr lvl="0" indent="0" marL="0">
               <a:buNone/>
             </a:pPr>
             <a:r>
               <a:rPr/>
-              <a:t>Jejunostomy feedings elevate blood sugars</a:t>
-            </a:r>
-          </a:p>
-          <a:p>
-            <a:pPr lvl="0"/>
-            <a:r>
-              <a:rPr/>
-              <a:t>Insulin may be required along with feeds</a:t>
-            </a:r>
-          </a:p>
-          <a:p>
-            <a:pPr lvl="0" indent="0" marL="0">
-              <a:buNone/>
-            </a:pPr>
-            <a:r>
-              <a:rPr/>
-              <a:t>Typical Pattern for tube feeds</a:t>
-            </a:r>
-          </a:p>
-          <a:p>
-            <a:pPr lvl="0"/>
-            <a:r>
-              <a:rPr/>
-              <a:t>Feeds run via pump from 6pm to 10am</a:t>
-            </a:r>
-          </a:p>
-          <a:p>
-            <a:pPr lvl="0"/>
-            <a:r>
-              <a:rPr/>
-              <a:t>Insulin at 6pm (70/30 insulin)</a:t>
-            </a:r>
-          </a:p>
-          <a:p>
-            <a:pPr lvl="0"/>
-            <a:r>
-              <a:rPr/>
-              <a:t>Insulin at Midnight (70/30 insulin)</a:t>
-            </a:r>
-          </a:p>
-          <a:p>
-            <a:pPr lvl="0"/>
-            <a:r>
-              <a:rPr/>
-              <a:t>No insulin if tube feedings are not run</a:t>
+              <a:t>Hospital nurses will teach use of the feeding tube</a:t>
             </a:r>
           </a:p>
         </p:txBody>
@@ -3664,8 +3649,8 @@
         </p:nvSpPr>
         <p:spPr>
           <a:xfrm>
-            <a:off x="315045" y="205979"/>
-            <a:ext cx="8529278" cy="857250"/>
+            <a:off x="284309" y="205979"/>
+            <a:ext cx="8552330" cy="662317"/>
           </a:xfrm>
         </p:spPr>
         <p:txBody>
@@ -3677,7 +3662,7 @@
             </a:pPr>
             <a:r>
               <a:rPr/>
-              <a:t>Jejunostomy Video</a:t>
+              <a:t>Jejunostomy Feeds with Diabetes</a:t>
             </a:r>
           </a:p>
         </p:txBody>
@@ -3689,7 +3674,7 @@
             <a:spLocks noGrp="1"/>
           </p:cNvSpPr>
           <p:nvPr>
-            <p:ph idx="1" sz="half"/>
+            <p:ph idx="1"/>
           </p:nvPr>
         </p:nvSpPr>
         <p:spPr/>
@@ -3702,41 +3687,55 @@
             </a:pPr>
             <a:r>
               <a:rPr/>
-              <a:t>A video is available to help become familiar with the feeding jejunostomy</a:t>
-            </a:r>
-          </a:p>
-        </p:txBody>
-      </p:sp>
-      <p:pic>
-        <p:nvPicPr>
-          <p:cNvPr descr="images/nutrition_jejunostomy_qrcode.png" id="0" name="Picture 1"/>
-          <p:cNvPicPr>
-            <a:picLocks noGrp="1" noChangeAspect="1"/>
-          </p:cNvPicPr>
-          <p:nvPr/>
-        </p:nvPicPr>
-        <p:blipFill>
-          <a:blip r:embed="rId2"/>
-          <a:stretch>
-            <a:fillRect/>
-          </a:stretch>
-        </p:blipFill>
-        <p:spPr bwMode="auto">
-          <a:xfrm>
-            <a:off x="5067300" y="1193800"/>
-            <a:ext cx="3327400" cy="3733800"/>
-          </a:xfrm>
-          <a:prstGeom prst="rect">
-            <a:avLst/>
-          </a:prstGeom>
-          <a:noFill/>
-          <a:ln w="9525">
-            <a:noFill/>
-            <a:headEnd/>
-            <a:tailEnd/>
-          </a:ln>
-        </p:spPr>
-      </p:pic>
+              <a:t>Jejunostomy feedings elevate blood sugars</a:t>
+            </a:r>
+          </a:p>
+          <a:p>
+            <a:pPr lvl="0"/>
+            <a:r>
+              <a:rPr/>
+              <a:t>Insulin may be required along with feeds</a:t>
+            </a:r>
+          </a:p>
+          <a:p>
+            <a:pPr lvl="0" indent="0" marL="0">
+              <a:buNone/>
+            </a:pPr>
+            <a:r>
+              <a:rPr/>
+              <a:t>Typical Pattern for tube feeds</a:t>
+            </a:r>
+          </a:p>
+          <a:p>
+            <a:pPr lvl="0"/>
+            <a:r>
+              <a:rPr/>
+              <a:t>Feeds run via pump from 6pm to 10am</a:t>
+            </a:r>
+          </a:p>
+          <a:p>
+            <a:pPr lvl="0"/>
+            <a:r>
+              <a:rPr/>
+              <a:t>Insulin at 6pm (70/30 insulin)</a:t>
+            </a:r>
+          </a:p>
+          <a:p>
+            <a:pPr lvl="0"/>
+            <a:r>
+              <a:rPr/>
+              <a:t>Insulin at Midnight (70/30 insulin)</a:t>
+            </a:r>
+          </a:p>
+          <a:p>
+            <a:pPr lvl="0"/>
+            <a:r>
+              <a:rPr/>
+              <a:t>No insulin if tube feedings are not run</a:t>
+            </a:r>
+          </a:p>
+        </p:txBody>
+      </p:sp>
     </p:spTree>
   </p:cSld>
 </p:sld>
@@ -3771,8 +3770,8 @@
         </p:nvSpPr>
         <p:spPr>
           <a:xfrm>
-            <a:off x="284309" y="205979"/>
-            <a:ext cx="8552330" cy="662317"/>
+            <a:off x="315045" y="205979"/>
+            <a:ext cx="8529278" cy="857250"/>
           </a:xfrm>
         </p:spPr>
         <p:txBody>
@@ -3784,7 +3783,7 @@
             </a:pPr>
             <a:r>
               <a:rPr/>
-              <a:t>Team Members - Physicians</a:t>
+              <a:t>Jejunostomy Video</a:t>
             </a:r>
           </a:p>
         </p:txBody>
@@ -3796,7 +3795,7 @@
             <a:spLocks noGrp="1"/>
           </p:cNvSpPr>
           <p:nvPr>
-            <p:ph idx="1"/>
+            <p:ph idx="1" sz="half"/>
           </p:nvPr>
         </p:nvSpPr>
         <p:spPr/>
@@ -3809,60 +3808,167 @@
             </a:pPr>
             <a:r>
               <a:rPr/>
-              <a:t>Primary Care Provider</a:t>
-            </a:r>
-          </a:p>
-          <a:p>
-            <a:pPr lvl="0" indent="0" marL="0">
-              <a:buNone/>
-            </a:pPr>
-            <a:r>
-              <a:rPr/>
-              <a:t>Gastroenterologist</a:t>
-            </a:r>
-          </a:p>
-          <a:p>
-            <a:pPr lvl="0" indent="0" marL="0">
-              <a:buNone/>
-            </a:pPr>
-            <a:r>
-              <a:rPr/>
-              <a:t>Medical Oncologist (chemotherapy)</a:t>
-            </a:r>
-          </a:p>
-          <a:p>
-            <a:pPr lvl="0" indent="0" marL="0">
-              <a:buNone/>
-            </a:pPr>
-            <a:r>
-              <a:rPr/>
-              <a:t>Radiation Oncologist (radiation)</a:t>
-            </a:r>
-          </a:p>
-          <a:p>
-            <a:pPr lvl="0" indent="0" marL="0">
-              <a:buNone/>
-            </a:pPr>
-            <a:r>
-              <a:rPr/>
-              <a:t>Surgeon</a:t>
-            </a:r>
-          </a:p>
-          <a:p>
-            <a:pPr lvl="0"/>
-            <a:r>
-              <a:rPr/>
-              <a:t>Jonathan Salo MD</a:t>
-            </a:r>
-          </a:p>
-        </p:txBody>
-      </p:sp>
+              <a:t>A video is available to help become familiar with the feeding jejunostomy</a:t>
+            </a:r>
+          </a:p>
+        </p:txBody>
+      </p:sp>
+      <p:pic>
+        <p:nvPicPr>
+          <p:cNvPr descr="images/nutrition_jejunostomy_qrcode.png" id="0" name="Picture 1"/>
+          <p:cNvPicPr>
+            <a:picLocks noGrp="1" noChangeAspect="1"/>
+          </p:cNvPicPr>
+          <p:nvPr/>
+        </p:nvPicPr>
+        <p:blipFill>
+          <a:blip r:embed="rId2"/>
+          <a:stretch>
+            <a:fillRect/>
+          </a:stretch>
+        </p:blipFill>
+        <p:spPr bwMode="auto">
+          <a:xfrm>
+            <a:off x="5067300" y="1193800"/>
+            <a:ext cx="3327400" cy="3733800"/>
+          </a:xfrm>
+          <a:prstGeom prst="rect">
+            <a:avLst/>
+          </a:prstGeom>
+          <a:noFill/>
+          <a:ln w="9525">
+            <a:noFill/>
+            <a:headEnd/>
+            <a:tailEnd/>
+          </a:ln>
+        </p:spPr>
+      </p:pic>
     </p:spTree>
   </p:cSld>
 </p:sld>
 </file>
 
 <file path=ppt/slides/slide13.xml><?xml version="1.0" encoding="utf-8"?>
+<p:sld xmlns:a="http://schemas.openxmlformats.org/drawingml/2006/main" xmlns:r="http://schemas.openxmlformats.org/officeDocument/2006/relationships" xmlns:p="http://schemas.openxmlformats.org/presentationml/2006/main">
+  <p:cSld>
+    <p:spTree>
+      <p:nvGrpSpPr>
+        <p:cNvPr id="1" name=""/>
+        <p:cNvGrpSpPr/>
+        <p:nvPr/>
+      </p:nvGrpSpPr>
+      <p:grpSpPr>
+        <a:xfrm>
+          <a:off x="0" y="0"/>
+          <a:ext cx="0" cy="0"/>
+          <a:chOff x="0" y="0"/>
+          <a:chExt cx="0" cy="0"/>
+        </a:xfrm>
+      </p:grpSpPr>
+      <p:sp>
+        <p:nvSpPr>
+          <p:cNvPr id="2" name="Title 1"/>
+          <p:cNvSpPr>
+            <a:spLocks noGrp="1"/>
+          </p:cNvSpPr>
+          <p:nvPr>
+            <p:ph type="title"/>
+          </p:nvPr>
+        </p:nvSpPr>
+        <p:spPr>
+          <a:xfrm>
+            <a:off x="284309" y="205979"/>
+            <a:ext cx="8552330" cy="662317"/>
+          </a:xfrm>
+        </p:spPr>
+        <p:txBody>
+          <a:bodyPr/>
+          <a:lstStyle/>
+          <a:p>
+            <a:pPr lvl="0" indent="0" marL="0">
+              <a:buNone/>
+            </a:pPr>
+            <a:r>
+              <a:rPr/>
+              <a:t>Team Members - Physicians</a:t>
+            </a:r>
+          </a:p>
+        </p:txBody>
+      </p:sp>
+      <p:sp>
+        <p:nvSpPr>
+          <p:cNvPr id="3" name="Content Placeholder 2"/>
+          <p:cNvSpPr>
+            <a:spLocks noGrp="1"/>
+          </p:cNvSpPr>
+          <p:nvPr>
+            <p:ph idx="1"/>
+          </p:nvPr>
+        </p:nvSpPr>
+        <p:spPr/>
+        <p:txBody>
+          <a:bodyPr/>
+          <a:lstStyle/>
+          <a:p>
+            <a:pPr lvl="0" indent="0" marL="0">
+              <a:buNone/>
+            </a:pPr>
+            <a:r>
+              <a:rPr/>
+              <a:t>Primary Care Provider</a:t>
+            </a:r>
+          </a:p>
+          <a:p>
+            <a:pPr lvl="0" indent="0" marL="0">
+              <a:buNone/>
+            </a:pPr>
+            <a:r>
+              <a:rPr/>
+              <a:t>Gastroenterologist</a:t>
+            </a:r>
+          </a:p>
+          <a:p>
+            <a:pPr lvl="0" indent="0" marL="0">
+              <a:buNone/>
+            </a:pPr>
+            <a:r>
+              <a:rPr/>
+              <a:t>Medical Oncologist (chemotherapy)</a:t>
+            </a:r>
+          </a:p>
+          <a:p>
+            <a:pPr lvl="0" indent="0" marL="0">
+              <a:buNone/>
+            </a:pPr>
+            <a:r>
+              <a:rPr/>
+              <a:t>Radiation Oncologist (radiation)</a:t>
+            </a:r>
+          </a:p>
+          <a:p>
+            <a:pPr lvl="0" indent="0" marL="0">
+              <a:buNone/>
+            </a:pPr>
+            <a:r>
+              <a:rPr/>
+              <a:t>Surgeon</a:t>
+            </a:r>
+          </a:p>
+          <a:p>
+            <a:pPr lvl="0"/>
+            <a:r>
+              <a:rPr/>
+              <a:t>Jonathan Salo MD</a:t>
+            </a:r>
+          </a:p>
+        </p:txBody>
+      </p:sp>
+    </p:spTree>
+  </p:cSld>
+</p:sld>
+</file>
+
+<file path=ppt/slides/slide14.xml><?xml version="1.0" encoding="utf-8"?>
 <p:sld xmlns:a="http://schemas.openxmlformats.org/drawingml/2006/main" xmlns:r="http://schemas.openxmlformats.org/officeDocument/2006/relationships" xmlns:p="http://schemas.openxmlformats.org/presentationml/2006/main">
   <p:cSld>
     <p:spTree>
@@ -4792,8 +4898,8 @@
         </p:nvSpPr>
         <p:spPr>
           <a:xfrm>
-            <a:off x="284309" y="205979"/>
-            <a:ext cx="8552330" cy="662317"/>
+            <a:off x="315045" y="205979"/>
+            <a:ext cx="8529278" cy="857250"/>
           </a:xfrm>
         </p:spPr>
         <p:txBody>
@@ -4805,7 +4911,7 @@
             </a:pPr>
             <a:r>
               <a:rPr/>
-              <a:t>Jejunostomy Typical Regimen</a:t>
+              <a:t>Jejunostomy Feeding Pump</a:t>
             </a:r>
           </a:p>
         </p:txBody>
@@ -4817,7 +4923,7 @@
             <a:spLocks noGrp="1"/>
           </p:cNvSpPr>
           <p:nvPr>
-            <p:ph idx="1"/>
+            <p:ph idx="1" sz="half"/>
           </p:nvPr>
         </p:nvSpPr>
         <p:spPr/>
@@ -4828,41 +4934,48 @@
             <a:pPr lvl="0"/>
             <a:r>
               <a:rPr/>
-              <a:t>Jejunostomy tube feeds for 16 hours (6pm-10am)</a:t>
-            </a:r>
-          </a:p>
-          <a:p>
-            <a:pPr lvl="1"/>
-            <a:r>
-              <a:rPr/>
-              <a:t>Men: 75mL/hour x 16 hours = 5 cartons</a:t>
-            </a:r>
-          </a:p>
-          <a:p>
-            <a:pPr lvl="1"/>
-            <a:r>
-              <a:rPr/>
-              <a:t>Women: 60mL/hour x 16 hours = 4 cartons</a:t>
+              <a:t>Pump administers feedings slowly</a:t>
             </a:r>
           </a:p>
           <a:p>
             <a:pPr lvl="0"/>
             <a:r>
               <a:rPr/>
-              <a:t>Water 240ml (8oz) via syringe 4x/day</a:t>
-            </a:r>
-          </a:p>
-          <a:p>
-            <a:pPr lvl="0" indent="0" marL="0">
-              <a:buNone/>
-            </a:pPr>
-            <a:r>
-              <a:rPr/>
-              <a:t>Hospital nurses will teach use of the feeding tube</a:t>
-            </a:r>
-          </a:p>
-        </p:txBody>
-      </p:sp>
+              <a:t>Rate can be easily adjusted</a:t>
+            </a:r>
+          </a:p>
+        </p:txBody>
+      </p:sp>
+      <p:pic>
+        <p:nvPicPr>
+          <p:cNvPr descr="images/jejunostomy/enteralbag_pump_hopistal.png" id="0" name="Picture 1"/>
+          <p:cNvPicPr>
+            <a:picLocks noGrp="1" noChangeAspect="1"/>
+          </p:cNvPicPr>
+          <p:nvPr/>
+        </p:nvPicPr>
+        <p:blipFill>
+          <a:blip r:embed="rId2"/>
+          <a:stretch>
+            <a:fillRect/>
+          </a:stretch>
+        </p:blipFill>
+        <p:spPr bwMode="auto">
+          <a:xfrm>
+            <a:off x="5448300" y="1193800"/>
+            <a:ext cx="2565400" cy="3733800"/>
+          </a:xfrm>
+          <a:prstGeom prst="rect">
+            <a:avLst/>
+          </a:prstGeom>
+          <a:noFill/>
+          <a:ln w="9525">
+            <a:noFill/>
+            <a:headEnd/>
+            <a:tailEnd/>
+          </a:ln>
+        </p:spPr>
+      </p:pic>
     </p:spTree>
   </p:cSld>
 </p:sld>
